--- a/青年聖歌I/(青年聖歌I6)你真偉大.pptx
+++ b/青年聖歌I/(青年聖歌I6)你真偉大.pptx
@@ -170,10 +170,9 @@
           <a:lstStyle/>
           <a:p>
             <a:r>
-              <a:rPr lang="zh-TW" altLang="en-US" smtClean="0"/>
+              <a:rPr lang="zh-TW" altLang="en-US"/>
               <a:t>按一下以編輯母片標題樣式</a:t>
             </a:r>
-            <a:endParaRPr lang="zh-TW" altLang="en-US"/>
           </a:p>
         </p:txBody>
       </p:sp>
@@ -289,10 +288,9 @@
           </a:lstStyle>
           <a:p>
             <a:r>
-              <a:rPr lang="zh-TW" altLang="en-US" smtClean="0"/>
+              <a:rPr lang="zh-TW" altLang="en-US"/>
               <a:t>按一下以編輯母片副標題樣式</a:t>
             </a:r>
-            <a:endParaRPr lang="zh-TW" altLang="en-US"/>
           </a:p>
         </p:txBody>
       </p:sp>
@@ -314,7 +312,7 @@
             <a:fld id="{18D434DE-7E94-479A-8252-0F1D004EB8DD}" type="datetimeFigureOut">
               <a:rPr lang="zh-TW" altLang="en-US" smtClean="0"/>
               <a:pPr/>
-              <a:t>2023/10/7</a:t>
+              <a:t>2024/4/25</a:t>
             </a:fld>
             <a:endParaRPr lang="zh-TW" altLang="en-US"/>
           </a:p>
@@ -409,10 +407,9 @@
           <a:lstStyle/>
           <a:p>
             <a:r>
-              <a:rPr lang="zh-TW" altLang="en-US" smtClean="0"/>
+              <a:rPr lang="zh-TW" altLang="en-US"/>
               <a:t>按一下以編輯母片標題樣式</a:t>
             </a:r>
-            <a:endParaRPr lang="zh-TW" altLang="en-US"/>
           </a:p>
         </p:txBody>
       </p:sp>
@@ -433,38 +430,37 @@
           <a:p>
             <a:pPr lvl="0"/>
             <a:r>
-              <a:rPr lang="zh-TW" altLang="en-US" smtClean="0"/>
+              <a:rPr lang="zh-TW" altLang="en-US"/>
               <a:t>按一下以編輯母片文字樣式</a:t>
             </a:r>
           </a:p>
           <a:p>
             <a:pPr lvl="1"/>
             <a:r>
-              <a:rPr lang="zh-TW" altLang="en-US" smtClean="0"/>
+              <a:rPr lang="zh-TW" altLang="en-US"/>
               <a:t>第二層</a:t>
             </a:r>
           </a:p>
           <a:p>
             <a:pPr lvl="2"/>
             <a:r>
-              <a:rPr lang="zh-TW" altLang="en-US" smtClean="0"/>
+              <a:rPr lang="zh-TW" altLang="en-US"/>
               <a:t>第三層</a:t>
             </a:r>
           </a:p>
           <a:p>
             <a:pPr lvl="3"/>
             <a:r>
-              <a:rPr lang="zh-TW" altLang="en-US" smtClean="0"/>
+              <a:rPr lang="zh-TW" altLang="en-US"/>
               <a:t>第四層</a:t>
             </a:r>
           </a:p>
           <a:p>
             <a:pPr lvl="4"/>
             <a:r>
-              <a:rPr lang="zh-TW" altLang="en-US" smtClean="0"/>
+              <a:rPr lang="zh-TW" altLang="en-US"/>
               <a:t>第五層</a:t>
             </a:r>
-            <a:endParaRPr lang="zh-TW" altLang="en-US"/>
           </a:p>
         </p:txBody>
       </p:sp>
@@ -486,7 +482,7 @@
             <a:fld id="{18D434DE-7E94-479A-8252-0F1D004EB8DD}" type="datetimeFigureOut">
               <a:rPr lang="zh-TW" altLang="en-US" smtClean="0"/>
               <a:pPr/>
-              <a:t>2023/10/7</a:t>
+              <a:t>2024/4/25</a:t>
             </a:fld>
             <a:endParaRPr lang="zh-TW" altLang="en-US"/>
           </a:p>
@@ -586,10 +582,9 @@
           <a:lstStyle/>
           <a:p>
             <a:r>
-              <a:rPr lang="zh-TW" altLang="en-US" smtClean="0"/>
+              <a:rPr lang="zh-TW" altLang="en-US"/>
               <a:t>按一下以編輯母片標題樣式</a:t>
             </a:r>
-            <a:endParaRPr lang="zh-TW" altLang="en-US"/>
           </a:p>
         </p:txBody>
       </p:sp>
@@ -615,38 +610,37 @@
           <a:p>
             <a:pPr lvl="0"/>
             <a:r>
-              <a:rPr lang="zh-TW" altLang="en-US" smtClean="0"/>
+              <a:rPr lang="zh-TW" altLang="en-US"/>
               <a:t>按一下以編輯母片文字樣式</a:t>
             </a:r>
           </a:p>
           <a:p>
             <a:pPr lvl="1"/>
             <a:r>
-              <a:rPr lang="zh-TW" altLang="en-US" smtClean="0"/>
+              <a:rPr lang="zh-TW" altLang="en-US"/>
               <a:t>第二層</a:t>
             </a:r>
           </a:p>
           <a:p>
             <a:pPr lvl="2"/>
             <a:r>
-              <a:rPr lang="zh-TW" altLang="en-US" smtClean="0"/>
+              <a:rPr lang="zh-TW" altLang="en-US"/>
               <a:t>第三層</a:t>
             </a:r>
           </a:p>
           <a:p>
             <a:pPr lvl="3"/>
             <a:r>
-              <a:rPr lang="zh-TW" altLang="en-US" smtClean="0"/>
+              <a:rPr lang="zh-TW" altLang="en-US"/>
               <a:t>第四層</a:t>
             </a:r>
           </a:p>
           <a:p>
             <a:pPr lvl="4"/>
             <a:r>
-              <a:rPr lang="zh-TW" altLang="en-US" smtClean="0"/>
+              <a:rPr lang="zh-TW" altLang="en-US"/>
               <a:t>第五層</a:t>
             </a:r>
-            <a:endParaRPr lang="zh-TW" altLang="en-US"/>
           </a:p>
         </p:txBody>
       </p:sp>
@@ -668,7 +662,7 @@
             <a:fld id="{18D434DE-7E94-479A-8252-0F1D004EB8DD}" type="datetimeFigureOut">
               <a:rPr lang="zh-TW" altLang="en-US" smtClean="0"/>
               <a:pPr/>
-              <a:t>2023/10/7</a:t>
+              <a:t>2024/4/25</a:t>
             </a:fld>
             <a:endParaRPr lang="zh-TW" altLang="en-US"/>
           </a:p>
@@ -763,10 +757,9 @@
           <a:lstStyle/>
           <a:p>
             <a:r>
-              <a:rPr lang="zh-TW" altLang="en-US" smtClean="0"/>
+              <a:rPr lang="zh-TW" altLang="en-US"/>
               <a:t>按一下以編輯母片標題樣式</a:t>
             </a:r>
-            <a:endParaRPr lang="zh-TW" altLang="en-US"/>
           </a:p>
         </p:txBody>
       </p:sp>
@@ -787,38 +780,37 @@
           <a:p>
             <a:pPr lvl="0"/>
             <a:r>
-              <a:rPr lang="zh-TW" altLang="en-US" smtClean="0"/>
+              <a:rPr lang="zh-TW" altLang="en-US"/>
               <a:t>按一下以編輯母片文字樣式</a:t>
             </a:r>
           </a:p>
           <a:p>
             <a:pPr lvl="1"/>
             <a:r>
-              <a:rPr lang="zh-TW" altLang="en-US" smtClean="0"/>
+              <a:rPr lang="zh-TW" altLang="en-US"/>
               <a:t>第二層</a:t>
             </a:r>
           </a:p>
           <a:p>
             <a:pPr lvl="2"/>
             <a:r>
-              <a:rPr lang="zh-TW" altLang="en-US" smtClean="0"/>
+              <a:rPr lang="zh-TW" altLang="en-US"/>
               <a:t>第三層</a:t>
             </a:r>
           </a:p>
           <a:p>
             <a:pPr lvl="3"/>
             <a:r>
-              <a:rPr lang="zh-TW" altLang="en-US" smtClean="0"/>
+              <a:rPr lang="zh-TW" altLang="en-US"/>
               <a:t>第四層</a:t>
             </a:r>
           </a:p>
           <a:p>
             <a:pPr lvl="4"/>
             <a:r>
-              <a:rPr lang="zh-TW" altLang="en-US" smtClean="0"/>
+              <a:rPr lang="zh-TW" altLang="en-US"/>
               <a:t>第五層</a:t>
             </a:r>
-            <a:endParaRPr lang="zh-TW" altLang="en-US"/>
           </a:p>
         </p:txBody>
       </p:sp>
@@ -840,7 +832,7 @@
             <a:fld id="{18D434DE-7E94-479A-8252-0F1D004EB8DD}" type="datetimeFigureOut">
               <a:rPr lang="zh-TW" altLang="en-US" smtClean="0"/>
               <a:pPr/>
-              <a:t>2023/10/7</a:t>
+              <a:t>2024/4/25</a:t>
             </a:fld>
             <a:endParaRPr lang="zh-TW" altLang="en-US"/>
           </a:p>
@@ -944,10 +936,9 @@
           </a:lstStyle>
           <a:p>
             <a:r>
-              <a:rPr lang="zh-TW" altLang="en-US" smtClean="0"/>
+              <a:rPr lang="zh-TW" altLang="en-US"/>
               <a:t>按一下以編輯母片標題樣式</a:t>
             </a:r>
-            <a:endParaRPr lang="zh-TW" altLang="en-US"/>
           </a:p>
         </p:txBody>
       </p:sp>
@@ -1064,7 +1055,7 @@
           <a:p>
             <a:pPr lvl="0"/>
             <a:r>
-              <a:rPr lang="zh-TW" altLang="en-US" smtClean="0"/>
+              <a:rPr lang="zh-TW" altLang="en-US"/>
               <a:t>按一下以編輯母片文字樣式</a:t>
             </a:r>
           </a:p>
@@ -1088,7 +1079,7 @@
             <a:fld id="{18D434DE-7E94-479A-8252-0F1D004EB8DD}" type="datetimeFigureOut">
               <a:rPr lang="zh-TW" altLang="en-US" smtClean="0"/>
               <a:pPr/>
-              <a:t>2023/10/7</a:t>
+              <a:t>2024/4/25</a:t>
             </a:fld>
             <a:endParaRPr lang="zh-TW" altLang="en-US"/>
           </a:p>
@@ -1183,10 +1174,9 @@
           <a:lstStyle/>
           <a:p>
             <a:r>
-              <a:rPr lang="zh-TW" altLang="en-US" smtClean="0"/>
+              <a:rPr lang="zh-TW" altLang="en-US"/>
               <a:t>按一下以編輯母片標題樣式</a:t>
             </a:r>
-            <a:endParaRPr lang="zh-TW" altLang="en-US"/>
           </a:p>
         </p:txBody>
       </p:sp>
@@ -1240,38 +1230,37 @@
           <a:p>
             <a:pPr lvl="0"/>
             <a:r>
-              <a:rPr lang="zh-TW" altLang="en-US" smtClean="0"/>
+              <a:rPr lang="zh-TW" altLang="en-US"/>
               <a:t>按一下以編輯母片文字樣式</a:t>
             </a:r>
           </a:p>
           <a:p>
             <a:pPr lvl="1"/>
             <a:r>
-              <a:rPr lang="zh-TW" altLang="en-US" smtClean="0"/>
+              <a:rPr lang="zh-TW" altLang="en-US"/>
               <a:t>第二層</a:t>
             </a:r>
           </a:p>
           <a:p>
             <a:pPr lvl="2"/>
             <a:r>
-              <a:rPr lang="zh-TW" altLang="en-US" smtClean="0"/>
+              <a:rPr lang="zh-TW" altLang="en-US"/>
               <a:t>第三層</a:t>
             </a:r>
           </a:p>
           <a:p>
             <a:pPr lvl="3"/>
             <a:r>
-              <a:rPr lang="zh-TW" altLang="en-US" smtClean="0"/>
+              <a:rPr lang="zh-TW" altLang="en-US"/>
               <a:t>第四層</a:t>
             </a:r>
           </a:p>
           <a:p>
             <a:pPr lvl="4"/>
             <a:r>
-              <a:rPr lang="zh-TW" altLang="en-US" smtClean="0"/>
+              <a:rPr lang="zh-TW" altLang="en-US"/>
               <a:t>第五層</a:t>
             </a:r>
-            <a:endParaRPr lang="zh-TW" altLang="en-US"/>
           </a:p>
         </p:txBody>
       </p:sp>
@@ -1325,38 +1314,37 @@
           <a:p>
             <a:pPr lvl="0"/>
             <a:r>
-              <a:rPr lang="zh-TW" altLang="en-US" smtClean="0"/>
+              <a:rPr lang="zh-TW" altLang="en-US"/>
               <a:t>按一下以編輯母片文字樣式</a:t>
             </a:r>
           </a:p>
           <a:p>
             <a:pPr lvl="1"/>
             <a:r>
-              <a:rPr lang="zh-TW" altLang="en-US" smtClean="0"/>
+              <a:rPr lang="zh-TW" altLang="en-US"/>
               <a:t>第二層</a:t>
             </a:r>
           </a:p>
           <a:p>
             <a:pPr lvl="2"/>
             <a:r>
-              <a:rPr lang="zh-TW" altLang="en-US" smtClean="0"/>
+              <a:rPr lang="zh-TW" altLang="en-US"/>
               <a:t>第三層</a:t>
             </a:r>
           </a:p>
           <a:p>
             <a:pPr lvl="3"/>
             <a:r>
-              <a:rPr lang="zh-TW" altLang="en-US" smtClean="0"/>
+              <a:rPr lang="zh-TW" altLang="en-US"/>
               <a:t>第四層</a:t>
             </a:r>
           </a:p>
           <a:p>
             <a:pPr lvl="4"/>
             <a:r>
-              <a:rPr lang="zh-TW" altLang="en-US" smtClean="0"/>
+              <a:rPr lang="zh-TW" altLang="en-US"/>
               <a:t>第五層</a:t>
             </a:r>
-            <a:endParaRPr lang="zh-TW" altLang="en-US"/>
           </a:p>
         </p:txBody>
       </p:sp>
@@ -1378,7 +1366,7 @@
             <a:fld id="{18D434DE-7E94-479A-8252-0F1D004EB8DD}" type="datetimeFigureOut">
               <a:rPr lang="zh-TW" altLang="en-US" smtClean="0"/>
               <a:pPr/>
-              <a:t>2023/10/7</a:t>
+              <a:t>2024/4/25</a:t>
             </a:fld>
             <a:endParaRPr lang="zh-TW" altLang="en-US"/>
           </a:p>
@@ -1477,10 +1465,9 @@
           </a:lstStyle>
           <a:p>
             <a:r>
-              <a:rPr lang="zh-TW" altLang="en-US" smtClean="0"/>
+              <a:rPr lang="zh-TW" altLang="en-US"/>
               <a:t>按一下以編輯母片標題樣式</a:t>
             </a:r>
-            <a:endParaRPr lang="zh-TW" altLang="en-US"/>
           </a:p>
         </p:txBody>
       </p:sp>
@@ -1543,7 +1530,7 @@
           <a:p>
             <a:pPr lvl="0"/>
             <a:r>
-              <a:rPr lang="zh-TW" altLang="en-US" smtClean="0"/>
+              <a:rPr lang="zh-TW" altLang="en-US"/>
               <a:t>按一下以編輯母片文字樣式</a:t>
             </a:r>
           </a:p>
@@ -1599,38 +1586,37 @@
           <a:p>
             <a:pPr lvl="0"/>
             <a:r>
-              <a:rPr lang="zh-TW" altLang="en-US" smtClean="0"/>
+              <a:rPr lang="zh-TW" altLang="en-US"/>
               <a:t>按一下以編輯母片文字樣式</a:t>
             </a:r>
           </a:p>
           <a:p>
             <a:pPr lvl="1"/>
             <a:r>
-              <a:rPr lang="zh-TW" altLang="en-US" smtClean="0"/>
+              <a:rPr lang="zh-TW" altLang="en-US"/>
               <a:t>第二層</a:t>
             </a:r>
           </a:p>
           <a:p>
             <a:pPr lvl="2"/>
             <a:r>
-              <a:rPr lang="zh-TW" altLang="en-US" smtClean="0"/>
+              <a:rPr lang="zh-TW" altLang="en-US"/>
               <a:t>第三層</a:t>
             </a:r>
           </a:p>
           <a:p>
             <a:pPr lvl="3"/>
             <a:r>
-              <a:rPr lang="zh-TW" altLang="en-US" smtClean="0"/>
+              <a:rPr lang="zh-TW" altLang="en-US"/>
               <a:t>第四層</a:t>
             </a:r>
           </a:p>
           <a:p>
             <a:pPr lvl="4"/>
             <a:r>
-              <a:rPr lang="zh-TW" altLang="en-US" smtClean="0"/>
+              <a:rPr lang="zh-TW" altLang="en-US"/>
               <a:t>第五層</a:t>
             </a:r>
-            <a:endParaRPr lang="zh-TW" altLang="en-US"/>
           </a:p>
         </p:txBody>
       </p:sp>
@@ -1693,7 +1679,7 @@
           <a:p>
             <a:pPr lvl="0"/>
             <a:r>
-              <a:rPr lang="zh-TW" altLang="en-US" smtClean="0"/>
+              <a:rPr lang="zh-TW" altLang="en-US"/>
               <a:t>按一下以編輯母片文字樣式</a:t>
             </a:r>
           </a:p>
@@ -1749,38 +1735,37 @@
           <a:p>
             <a:pPr lvl="0"/>
             <a:r>
-              <a:rPr lang="zh-TW" altLang="en-US" smtClean="0"/>
+              <a:rPr lang="zh-TW" altLang="en-US"/>
               <a:t>按一下以編輯母片文字樣式</a:t>
             </a:r>
           </a:p>
           <a:p>
             <a:pPr lvl="1"/>
             <a:r>
-              <a:rPr lang="zh-TW" altLang="en-US" smtClean="0"/>
+              <a:rPr lang="zh-TW" altLang="en-US"/>
               <a:t>第二層</a:t>
             </a:r>
           </a:p>
           <a:p>
             <a:pPr lvl="2"/>
             <a:r>
-              <a:rPr lang="zh-TW" altLang="en-US" smtClean="0"/>
+              <a:rPr lang="zh-TW" altLang="en-US"/>
               <a:t>第三層</a:t>
             </a:r>
           </a:p>
           <a:p>
             <a:pPr lvl="3"/>
             <a:r>
-              <a:rPr lang="zh-TW" altLang="en-US" smtClean="0"/>
+              <a:rPr lang="zh-TW" altLang="en-US"/>
               <a:t>第四層</a:t>
             </a:r>
           </a:p>
           <a:p>
             <a:pPr lvl="4"/>
             <a:r>
-              <a:rPr lang="zh-TW" altLang="en-US" smtClean="0"/>
+              <a:rPr lang="zh-TW" altLang="en-US"/>
               <a:t>第五層</a:t>
             </a:r>
-            <a:endParaRPr lang="zh-TW" altLang="en-US"/>
           </a:p>
         </p:txBody>
       </p:sp>
@@ -1802,7 +1787,7 @@
             <a:fld id="{18D434DE-7E94-479A-8252-0F1D004EB8DD}" type="datetimeFigureOut">
               <a:rPr lang="zh-TW" altLang="en-US" smtClean="0"/>
               <a:pPr/>
-              <a:t>2023/10/7</a:t>
+              <a:t>2024/4/25</a:t>
             </a:fld>
             <a:endParaRPr lang="zh-TW" altLang="en-US"/>
           </a:p>
@@ -1897,10 +1882,9 @@
           <a:lstStyle/>
           <a:p>
             <a:r>
-              <a:rPr lang="zh-TW" altLang="en-US" smtClean="0"/>
+              <a:rPr lang="zh-TW" altLang="en-US"/>
               <a:t>按一下以編輯母片標題樣式</a:t>
             </a:r>
-            <a:endParaRPr lang="zh-TW" altLang="en-US"/>
           </a:p>
         </p:txBody>
       </p:sp>
@@ -1922,7 +1906,7 @@
             <a:fld id="{18D434DE-7E94-479A-8252-0F1D004EB8DD}" type="datetimeFigureOut">
               <a:rPr lang="zh-TW" altLang="en-US" smtClean="0"/>
               <a:pPr/>
-              <a:t>2023/10/7</a:t>
+              <a:t>2024/4/25</a:t>
             </a:fld>
             <a:endParaRPr lang="zh-TW" altLang="en-US"/>
           </a:p>
@@ -2019,7 +2003,7 @@
             <a:fld id="{18D434DE-7E94-479A-8252-0F1D004EB8DD}" type="datetimeFigureOut">
               <a:rPr lang="zh-TW" altLang="en-US" smtClean="0"/>
               <a:pPr/>
-              <a:t>2023/10/7</a:t>
+              <a:t>2024/4/25</a:t>
             </a:fld>
             <a:endParaRPr lang="zh-TW" altLang="en-US"/>
           </a:p>
@@ -2123,10 +2107,9 @@
           </a:lstStyle>
           <a:p>
             <a:r>
-              <a:rPr lang="zh-TW" altLang="en-US" smtClean="0"/>
+              <a:rPr lang="zh-TW" altLang="en-US"/>
               <a:t>按一下以編輯母片標題樣式</a:t>
             </a:r>
-            <a:endParaRPr lang="zh-TW" altLang="en-US"/>
           </a:p>
         </p:txBody>
       </p:sp>
@@ -2180,38 +2163,37 @@
           <a:p>
             <a:pPr lvl="0"/>
             <a:r>
-              <a:rPr lang="zh-TW" altLang="en-US" smtClean="0"/>
+              <a:rPr lang="zh-TW" altLang="en-US"/>
               <a:t>按一下以編輯母片文字樣式</a:t>
             </a:r>
           </a:p>
           <a:p>
             <a:pPr lvl="1"/>
             <a:r>
-              <a:rPr lang="zh-TW" altLang="en-US" smtClean="0"/>
+              <a:rPr lang="zh-TW" altLang="en-US"/>
               <a:t>第二層</a:t>
             </a:r>
           </a:p>
           <a:p>
             <a:pPr lvl="2"/>
             <a:r>
-              <a:rPr lang="zh-TW" altLang="en-US" smtClean="0"/>
+              <a:rPr lang="zh-TW" altLang="en-US"/>
               <a:t>第三層</a:t>
             </a:r>
           </a:p>
           <a:p>
             <a:pPr lvl="3"/>
             <a:r>
-              <a:rPr lang="zh-TW" altLang="en-US" smtClean="0"/>
+              <a:rPr lang="zh-TW" altLang="en-US"/>
               <a:t>第四層</a:t>
             </a:r>
           </a:p>
           <a:p>
             <a:pPr lvl="4"/>
             <a:r>
-              <a:rPr lang="zh-TW" altLang="en-US" smtClean="0"/>
+              <a:rPr lang="zh-TW" altLang="en-US"/>
               <a:t>第五層</a:t>
             </a:r>
-            <a:endParaRPr lang="zh-TW" altLang="en-US"/>
           </a:p>
         </p:txBody>
       </p:sp>
@@ -2274,7 +2256,7 @@
           <a:p>
             <a:pPr lvl="0"/>
             <a:r>
-              <a:rPr lang="zh-TW" altLang="en-US" smtClean="0"/>
+              <a:rPr lang="zh-TW" altLang="en-US"/>
               <a:t>按一下以編輯母片文字樣式</a:t>
             </a:r>
           </a:p>
@@ -2298,7 +2280,7 @@
             <a:fld id="{18D434DE-7E94-479A-8252-0F1D004EB8DD}" type="datetimeFigureOut">
               <a:rPr lang="zh-TW" altLang="en-US" smtClean="0"/>
               <a:pPr/>
-              <a:t>2023/10/7</a:t>
+              <a:t>2024/4/25</a:t>
             </a:fld>
             <a:endParaRPr lang="zh-TW" altLang="en-US"/>
           </a:p>
@@ -2402,10 +2384,9 @@
           </a:lstStyle>
           <a:p>
             <a:r>
-              <a:rPr lang="zh-TW" altLang="en-US" smtClean="0"/>
+              <a:rPr lang="zh-TW" altLang="en-US"/>
               <a:t>按一下以編輯母片標題樣式</a:t>
             </a:r>
-            <a:endParaRPr lang="zh-TW" altLang="en-US"/>
           </a:p>
         </p:txBody>
       </p:sp>
@@ -2467,10 +2448,9 @@
           </a:lstStyle>
           <a:p>
             <a:r>
-              <a:rPr lang="zh-TW" altLang="en-US" smtClean="0"/>
+              <a:rPr lang="zh-TW" altLang="en-US"/>
               <a:t>按一下圖示以新增圖片</a:t>
             </a:r>
-            <a:endParaRPr lang="zh-TW" altLang="en-US"/>
           </a:p>
         </p:txBody>
       </p:sp>
@@ -2533,7 +2513,7 @@
           <a:p>
             <a:pPr lvl="0"/>
             <a:r>
-              <a:rPr lang="zh-TW" altLang="en-US" smtClean="0"/>
+              <a:rPr lang="zh-TW" altLang="en-US"/>
               <a:t>按一下以編輯母片文字樣式</a:t>
             </a:r>
           </a:p>
@@ -2557,7 +2537,7 @@
             <a:fld id="{18D434DE-7E94-479A-8252-0F1D004EB8DD}" type="datetimeFigureOut">
               <a:rPr lang="zh-TW" altLang="en-US" smtClean="0"/>
               <a:pPr/>
-              <a:t>2023/10/7</a:t>
+              <a:t>2024/4/25</a:t>
             </a:fld>
             <a:endParaRPr lang="zh-TW" altLang="en-US"/>
           </a:p>
@@ -2672,10 +2652,9 @@
           <a:lstStyle/>
           <a:p>
             <a:r>
-              <a:rPr lang="zh-TW" altLang="en-US" smtClean="0"/>
+              <a:rPr lang="zh-TW" altLang="en-US"/>
               <a:t>按一下以編輯母片標題樣式</a:t>
             </a:r>
-            <a:endParaRPr lang="zh-TW" altLang="en-US"/>
           </a:p>
         </p:txBody>
       </p:sp>
@@ -2706,38 +2685,37 @@
           <a:p>
             <a:pPr lvl="0"/>
             <a:r>
-              <a:rPr lang="zh-TW" altLang="en-US" smtClean="0"/>
+              <a:rPr lang="zh-TW" altLang="en-US"/>
               <a:t>按一下以編輯母片文字樣式</a:t>
             </a:r>
           </a:p>
           <a:p>
             <a:pPr lvl="1"/>
             <a:r>
-              <a:rPr lang="zh-TW" altLang="en-US" smtClean="0"/>
+              <a:rPr lang="zh-TW" altLang="en-US"/>
               <a:t>第二層</a:t>
             </a:r>
           </a:p>
           <a:p>
             <a:pPr lvl="2"/>
             <a:r>
-              <a:rPr lang="zh-TW" altLang="en-US" smtClean="0"/>
+              <a:rPr lang="zh-TW" altLang="en-US"/>
               <a:t>第三層</a:t>
             </a:r>
           </a:p>
           <a:p>
             <a:pPr lvl="3"/>
             <a:r>
-              <a:rPr lang="zh-TW" altLang="en-US" smtClean="0"/>
+              <a:rPr lang="zh-TW" altLang="en-US"/>
               <a:t>第四層</a:t>
             </a:r>
           </a:p>
           <a:p>
             <a:pPr lvl="4"/>
             <a:r>
-              <a:rPr lang="zh-TW" altLang="en-US" smtClean="0"/>
+              <a:rPr lang="zh-TW" altLang="en-US"/>
               <a:t>第五層</a:t>
             </a:r>
-            <a:endParaRPr lang="zh-TW" altLang="en-US"/>
           </a:p>
         </p:txBody>
       </p:sp>
@@ -2777,7 +2755,7 @@
             <a:fld id="{18D434DE-7E94-479A-8252-0F1D004EB8DD}" type="datetimeFigureOut">
               <a:rPr lang="zh-TW" altLang="en-US" smtClean="0"/>
               <a:pPr/>
-              <a:t>2023/10/7</a:t>
+              <a:t>2024/4/25</a:t>
             </a:fld>
             <a:endParaRPr lang="zh-TW" altLang="en-US"/>
           </a:p>
@@ -3374,20 +3352,10 @@
                 <a:latin typeface="Microsoft JhengHei" panose="020B0604030504040204" pitchFamily="34" charset="-120"/>
                 <a:ea typeface="Microsoft JhengHei" panose="020B0604030504040204" pitchFamily="34" charset="-120"/>
               </a:rPr>
-              <a:t>( </a:t>
-            </a:r>
-            <a:r>
-              <a:rPr lang="en-US" sz="3600" b="1" dirty="0" smtClean="0">
-                <a:solidFill>
-                  <a:srgbClr val="660033"/>
-                </a:solidFill>
-                <a:latin typeface="Microsoft JhengHei" panose="020B0604030504040204" pitchFamily="34" charset="-120"/>
-                <a:ea typeface="Microsoft JhengHei" panose="020B0604030504040204" pitchFamily="34" charset="-120"/>
-              </a:rPr>
-              <a:t>2 </a:t>
-            </a:r>
-            <a:r>
-              <a:rPr lang="zh-CN" altLang="en-US" sz="3600" b="1" dirty="0" smtClean="0">
+              <a:t>( 2 </a:t>
+            </a:r>
+            <a:r>
+              <a:rPr lang="zh-CN" altLang="en-US" sz="3600" b="1" dirty="0">
                 <a:solidFill>
                   <a:srgbClr val="660033"/>
                 </a:solidFill>
@@ -3397,24 +3365,14 @@
               <a:t>次</a:t>
             </a:r>
             <a:r>
-              <a:rPr lang="en-US" sz="3600" b="1" dirty="0" smtClean="0">
+              <a:rPr lang="en-US" sz="3600" b="1" dirty="0">
                 <a:solidFill>
                   <a:srgbClr val="660033"/>
                 </a:solidFill>
                 <a:latin typeface="Microsoft JhengHei" panose="020B0604030504040204" pitchFamily="34" charset="-120"/>
                 <a:ea typeface="Microsoft JhengHei" panose="020B0604030504040204" pitchFamily="34" charset="-120"/>
               </a:rPr>
-              <a:t> </a:t>
-            </a:r>
-            <a:r>
-              <a:rPr lang="en-US" sz="3600" b="1" dirty="0">
-                <a:solidFill>
-                  <a:srgbClr val="660033"/>
-                </a:solidFill>
-                <a:latin typeface="Microsoft JhengHei" panose="020B0604030504040204" pitchFamily="34" charset="-120"/>
-                <a:ea typeface="Microsoft JhengHei" panose="020B0604030504040204" pitchFamily="34" charset="-120"/>
-              </a:rPr>
-              <a:t>)</a:t>
+              <a:t> )</a:t>
             </a:r>
             <a:endParaRPr lang="vi-VN" sz="3600" b="1" dirty="0">
               <a:solidFill>
@@ -3561,23 +3519,7 @@
                   <a:srgbClr val="660033"/>
                 </a:solidFill>
               </a:rPr>
-              <a:t>( </a:t>
-            </a:r>
-            <a:r>
-              <a:rPr lang="en-US" sz="4000" b="1" dirty="0" smtClean="0">
-                <a:solidFill>
-                  <a:srgbClr val="660033"/>
-                </a:solidFill>
-              </a:rPr>
-              <a:t>1 / 3 </a:t>
-            </a:r>
-            <a:r>
-              <a:rPr lang="en-US" sz="4000" b="1" dirty="0">
-                <a:solidFill>
-                  <a:srgbClr val="660033"/>
-                </a:solidFill>
-              </a:rPr>
-              <a:t>)</a:t>
+              <a:t>( 1 / 3 )</a:t>
             </a:r>
             <a:endParaRPr lang="vi-VN" sz="4000" b="1" dirty="0">
               <a:solidFill>
@@ -3682,7 +3624,37 @@
                 <a:latin typeface="微軟正黑體" pitchFamily="34" charset="-120"/>
                 <a:ea typeface="微軟正黑體" pitchFamily="34" charset="-120"/>
               </a:rPr>
-              <a:t>的大能  遍滿了宇宙中</a:t>
+              <a:t>的大</a:t>
+            </a:r>
+            <a:r>
+              <a:rPr lang="zh-CN" altLang="en-US" sz="6400" b="1">
+                <a:solidFill>
+                  <a:srgbClr val="660033"/>
+                </a:solidFill>
+                <a:latin typeface="微軟正黑體" pitchFamily="34" charset="-120"/>
+                <a:ea typeface="微軟正黑體" pitchFamily="34" charset="-120"/>
+              </a:rPr>
+              <a:t>工</a:t>
+            </a:r>
+            <a:r>
+              <a:rPr lang="zh-TW" altLang="en-US" sz="6400" b="1">
+                <a:solidFill>
+                  <a:srgbClr val="660033"/>
+                </a:solidFill>
+                <a:latin typeface="微軟正黑體" pitchFamily="34" charset="-120"/>
+                <a:ea typeface="微軟正黑體" pitchFamily="34" charset="-120"/>
+              </a:rPr>
+              <a:t>  </a:t>
+            </a:r>
+            <a:r>
+              <a:rPr lang="zh-TW" altLang="en-US" sz="6400" b="1" dirty="0">
+                <a:solidFill>
+                  <a:srgbClr val="660033"/>
+                </a:solidFill>
+                <a:latin typeface="微軟正黑體" pitchFamily="34" charset="-120"/>
+                <a:ea typeface="微軟正黑體" pitchFamily="34" charset="-120"/>
+              </a:rPr>
+              <a:t>遍滿了宇宙中</a:t>
             </a:r>
           </a:p>
         </p:txBody>
@@ -3874,20 +3846,10 @@
                 <a:latin typeface="Microsoft JhengHei" panose="020B0604030504040204" pitchFamily="34" charset="-120"/>
                 <a:ea typeface="Microsoft JhengHei" panose="020B0604030504040204" pitchFamily="34" charset="-120"/>
               </a:rPr>
-              <a:t>( </a:t>
-            </a:r>
-            <a:r>
-              <a:rPr lang="en-US" sz="3600" b="1" dirty="0" smtClean="0">
-                <a:solidFill>
-                  <a:srgbClr val="660033"/>
-                </a:solidFill>
-                <a:latin typeface="Microsoft JhengHei" panose="020B0604030504040204" pitchFamily="34" charset="-120"/>
-                <a:ea typeface="Microsoft JhengHei" panose="020B0604030504040204" pitchFamily="34" charset="-120"/>
-              </a:rPr>
-              <a:t>2 </a:t>
-            </a:r>
-            <a:r>
-              <a:rPr lang="zh-CN" altLang="en-US" sz="3600" b="1" dirty="0" smtClean="0">
+              <a:t>( 2 </a:t>
+            </a:r>
+            <a:r>
+              <a:rPr lang="zh-CN" altLang="en-US" sz="3600" b="1" dirty="0">
                 <a:solidFill>
                   <a:srgbClr val="660033"/>
                 </a:solidFill>
@@ -3897,24 +3859,14 @@
               <a:t>次</a:t>
             </a:r>
             <a:r>
-              <a:rPr lang="en-US" sz="3600" b="1" dirty="0" smtClean="0">
+              <a:rPr lang="en-US" sz="3600" b="1" dirty="0">
                 <a:solidFill>
                   <a:srgbClr val="660033"/>
                 </a:solidFill>
                 <a:latin typeface="Microsoft JhengHei" panose="020B0604030504040204" pitchFamily="34" charset="-120"/>
                 <a:ea typeface="Microsoft JhengHei" panose="020B0604030504040204" pitchFamily="34" charset="-120"/>
               </a:rPr>
-              <a:t> </a:t>
-            </a:r>
-            <a:r>
-              <a:rPr lang="en-US" sz="3600" b="1" dirty="0">
-                <a:solidFill>
-                  <a:srgbClr val="660033"/>
-                </a:solidFill>
-                <a:latin typeface="Microsoft JhengHei" panose="020B0604030504040204" pitchFamily="34" charset="-120"/>
-                <a:ea typeface="Microsoft JhengHei" panose="020B0604030504040204" pitchFamily="34" charset="-120"/>
-              </a:rPr>
-              <a:t>)</a:t>
+              <a:t> )</a:t>
             </a:r>
             <a:endParaRPr lang="vi-VN" sz="3600" b="1" dirty="0">
               <a:solidFill>
@@ -4071,23 +4023,7 @@
                   <a:srgbClr val="660033"/>
                 </a:solidFill>
               </a:rPr>
-              <a:t>( </a:t>
-            </a:r>
-            <a:r>
-              <a:rPr lang="en-US" sz="4000" b="1" dirty="0">
-                <a:solidFill>
-                  <a:srgbClr val="660033"/>
-                </a:solidFill>
-              </a:rPr>
-              <a:t>2 </a:t>
-            </a:r>
-            <a:r>
-              <a:rPr lang="en-US" sz="4000" b="1" dirty="0">
-                <a:solidFill>
-                  <a:srgbClr val="660033"/>
-                </a:solidFill>
-              </a:rPr>
-              <a:t>/ 3 )</a:t>
+              <a:t>( 2 / 3 )</a:t>
             </a:r>
             <a:endParaRPr lang="vi-VN" sz="4000" b="1" dirty="0">
               <a:solidFill>
@@ -4374,20 +4310,10 @@
                 <a:latin typeface="Microsoft JhengHei" panose="020B0604030504040204" pitchFamily="34" charset="-120"/>
                 <a:ea typeface="Microsoft JhengHei" panose="020B0604030504040204" pitchFamily="34" charset="-120"/>
               </a:rPr>
-              <a:t>( </a:t>
-            </a:r>
-            <a:r>
-              <a:rPr lang="en-US" sz="3600" b="1" dirty="0" smtClean="0">
-                <a:solidFill>
-                  <a:srgbClr val="660033"/>
-                </a:solidFill>
-                <a:latin typeface="Microsoft JhengHei" panose="020B0604030504040204" pitchFamily="34" charset="-120"/>
-                <a:ea typeface="Microsoft JhengHei" panose="020B0604030504040204" pitchFamily="34" charset="-120"/>
-              </a:rPr>
-              <a:t>2 </a:t>
-            </a:r>
-            <a:r>
-              <a:rPr lang="zh-CN" altLang="en-US" sz="3600" b="1" dirty="0" smtClean="0">
+              <a:t>( 2 </a:t>
+            </a:r>
+            <a:r>
+              <a:rPr lang="zh-CN" altLang="en-US" sz="3600" b="1" dirty="0">
                 <a:solidFill>
                   <a:srgbClr val="660033"/>
                 </a:solidFill>
@@ -4397,24 +4323,14 @@
               <a:t>次</a:t>
             </a:r>
             <a:r>
-              <a:rPr lang="en-US" sz="3600" b="1" dirty="0" smtClean="0">
+              <a:rPr lang="en-US" sz="3600" b="1" dirty="0">
                 <a:solidFill>
                   <a:srgbClr val="660033"/>
                 </a:solidFill>
                 <a:latin typeface="Microsoft JhengHei" panose="020B0604030504040204" pitchFamily="34" charset="-120"/>
                 <a:ea typeface="Microsoft JhengHei" panose="020B0604030504040204" pitchFamily="34" charset="-120"/>
               </a:rPr>
-              <a:t> </a:t>
-            </a:r>
-            <a:r>
-              <a:rPr lang="en-US" sz="3600" b="1" dirty="0">
-                <a:solidFill>
-                  <a:srgbClr val="660033"/>
-                </a:solidFill>
-                <a:latin typeface="Microsoft JhengHei" panose="020B0604030504040204" pitchFamily="34" charset="-120"/>
-                <a:ea typeface="Microsoft JhengHei" panose="020B0604030504040204" pitchFamily="34" charset="-120"/>
-              </a:rPr>
-              <a:t>)</a:t>
+              <a:t> )</a:t>
             </a:r>
             <a:endParaRPr lang="vi-VN" sz="3600" b="1" dirty="0">
               <a:solidFill>
@@ -4551,23 +4467,7 @@
                   <a:srgbClr val="660033"/>
                 </a:solidFill>
               </a:rPr>
-              <a:t>( </a:t>
-            </a:r>
-            <a:r>
-              <a:rPr lang="en-US" sz="4000" b="1" dirty="0">
-                <a:solidFill>
-                  <a:srgbClr val="660033"/>
-                </a:solidFill>
-              </a:rPr>
-              <a:t>3 </a:t>
-            </a:r>
-            <a:r>
-              <a:rPr lang="en-US" sz="4000" b="1" dirty="0">
-                <a:solidFill>
-                  <a:srgbClr val="660033"/>
-                </a:solidFill>
-              </a:rPr>
-              <a:t>/ 3 )</a:t>
+              <a:t>( 3 / 3 )</a:t>
             </a:r>
             <a:endParaRPr lang="vi-VN" sz="4000" b="1" dirty="0">
               <a:solidFill>

--- a/青年聖歌I/(青年聖歌I6)你真偉大.pptx
+++ b/青年聖歌I/(青年聖歌I6)你真偉大.pptx
@@ -312,7 +312,7 @@
             <a:fld id="{18D434DE-7E94-479A-8252-0F1D004EB8DD}" type="datetimeFigureOut">
               <a:rPr lang="zh-TW" altLang="en-US" smtClean="0"/>
               <a:pPr/>
-              <a:t>2024/4/25</a:t>
+              <a:t>2025/5/31</a:t>
             </a:fld>
             <a:endParaRPr lang="zh-TW" altLang="en-US"/>
           </a:p>
@@ -482,7 +482,7 @@
             <a:fld id="{18D434DE-7E94-479A-8252-0F1D004EB8DD}" type="datetimeFigureOut">
               <a:rPr lang="zh-TW" altLang="en-US" smtClean="0"/>
               <a:pPr/>
-              <a:t>2024/4/25</a:t>
+              <a:t>2025/5/31</a:t>
             </a:fld>
             <a:endParaRPr lang="zh-TW" altLang="en-US"/>
           </a:p>
@@ -662,7 +662,7 @@
             <a:fld id="{18D434DE-7E94-479A-8252-0F1D004EB8DD}" type="datetimeFigureOut">
               <a:rPr lang="zh-TW" altLang="en-US" smtClean="0"/>
               <a:pPr/>
-              <a:t>2024/4/25</a:t>
+              <a:t>2025/5/31</a:t>
             </a:fld>
             <a:endParaRPr lang="zh-TW" altLang="en-US"/>
           </a:p>
@@ -832,7 +832,7 @@
             <a:fld id="{18D434DE-7E94-479A-8252-0F1D004EB8DD}" type="datetimeFigureOut">
               <a:rPr lang="zh-TW" altLang="en-US" smtClean="0"/>
               <a:pPr/>
-              <a:t>2024/4/25</a:t>
+              <a:t>2025/5/31</a:t>
             </a:fld>
             <a:endParaRPr lang="zh-TW" altLang="en-US"/>
           </a:p>
@@ -1079,7 +1079,7 @@
             <a:fld id="{18D434DE-7E94-479A-8252-0F1D004EB8DD}" type="datetimeFigureOut">
               <a:rPr lang="zh-TW" altLang="en-US" smtClean="0"/>
               <a:pPr/>
-              <a:t>2024/4/25</a:t>
+              <a:t>2025/5/31</a:t>
             </a:fld>
             <a:endParaRPr lang="zh-TW" altLang="en-US"/>
           </a:p>
@@ -1366,7 +1366,7 @@
             <a:fld id="{18D434DE-7E94-479A-8252-0F1D004EB8DD}" type="datetimeFigureOut">
               <a:rPr lang="zh-TW" altLang="en-US" smtClean="0"/>
               <a:pPr/>
-              <a:t>2024/4/25</a:t>
+              <a:t>2025/5/31</a:t>
             </a:fld>
             <a:endParaRPr lang="zh-TW" altLang="en-US"/>
           </a:p>
@@ -1787,7 +1787,7 @@
             <a:fld id="{18D434DE-7E94-479A-8252-0F1D004EB8DD}" type="datetimeFigureOut">
               <a:rPr lang="zh-TW" altLang="en-US" smtClean="0"/>
               <a:pPr/>
-              <a:t>2024/4/25</a:t>
+              <a:t>2025/5/31</a:t>
             </a:fld>
             <a:endParaRPr lang="zh-TW" altLang="en-US"/>
           </a:p>
@@ -1906,7 +1906,7 @@
             <a:fld id="{18D434DE-7E94-479A-8252-0F1D004EB8DD}" type="datetimeFigureOut">
               <a:rPr lang="zh-TW" altLang="en-US" smtClean="0"/>
               <a:pPr/>
-              <a:t>2024/4/25</a:t>
+              <a:t>2025/5/31</a:t>
             </a:fld>
             <a:endParaRPr lang="zh-TW" altLang="en-US"/>
           </a:p>
@@ -2003,7 +2003,7 @@
             <a:fld id="{18D434DE-7E94-479A-8252-0F1D004EB8DD}" type="datetimeFigureOut">
               <a:rPr lang="zh-TW" altLang="en-US" smtClean="0"/>
               <a:pPr/>
-              <a:t>2024/4/25</a:t>
+              <a:t>2025/5/31</a:t>
             </a:fld>
             <a:endParaRPr lang="zh-TW" altLang="en-US"/>
           </a:p>
@@ -2280,7 +2280,7 @@
             <a:fld id="{18D434DE-7E94-479A-8252-0F1D004EB8DD}" type="datetimeFigureOut">
               <a:rPr lang="zh-TW" altLang="en-US" smtClean="0"/>
               <a:pPr/>
-              <a:t>2024/4/25</a:t>
+              <a:t>2025/5/31</a:t>
             </a:fld>
             <a:endParaRPr lang="zh-TW" altLang="en-US"/>
           </a:p>
@@ -2537,7 +2537,7 @@
             <a:fld id="{18D434DE-7E94-479A-8252-0F1D004EB8DD}" type="datetimeFigureOut">
               <a:rPr lang="zh-TW" altLang="en-US" smtClean="0"/>
               <a:pPr/>
-              <a:t>2024/4/25</a:t>
+              <a:t>2025/5/31</a:t>
             </a:fld>
             <a:endParaRPr lang="zh-TW" altLang="en-US"/>
           </a:p>
@@ -2755,7 +2755,7 @@
             <a:fld id="{18D434DE-7E94-479A-8252-0F1D004EB8DD}" type="datetimeFigureOut">
               <a:rPr lang="zh-TW" altLang="en-US" smtClean="0"/>
               <a:pPr/>
-              <a:t>2024/4/25</a:t>
+              <a:t>2025/5/31</a:t>
             </a:fld>
             <a:endParaRPr lang="zh-TW" altLang="en-US"/>
           </a:p>
@@ -3143,7 +3143,7 @@
         </p:nvSpPr>
         <p:spPr>
           <a:xfrm>
-            <a:off x="0" y="2857513"/>
+            <a:off x="0" y="2636912"/>
             <a:ext cx="12192000" cy="1143000"/>
           </a:xfrm>
         </p:spPr>

--- a/青年聖歌I/(青年聖歌I6)你真偉大.pptx
+++ b/青年聖歌I/(青年聖歌I6)你真偉大.pptx
@@ -5,7 +5,7 @@
     <p:sldMasterId id="2147483672" r:id="rId1"/>
   </p:sldMasterIdLst>
   <p:sldIdLst>
-    <p:sldId id="256" r:id="rId2"/>
+    <p:sldId id="393" r:id="rId2"/>
     <p:sldId id="257" r:id="rId3"/>
     <p:sldId id="258" r:id="rId4"/>
     <p:sldId id="259" r:id="rId5"/>
@@ -312,7 +312,7 @@
             <a:fld id="{18D434DE-7E94-479A-8252-0F1D004EB8DD}" type="datetimeFigureOut">
               <a:rPr lang="zh-TW" altLang="en-US" smtClean="0"/>
               <a:pPr/>
-              <a:t>2025/5/31</a:t>
+              <a:t>2026/5/22</a:t>
             </a:fld>
             <a:endParaRPr lang="zh-TW" altLang="en-US"/>
           </a:p>
@@ -482,7 +482,7 @@
             <a:fld id="{18D434DE-7E94-479A-8252-0F1D004EB8DD}" type="datetimeFigureOut">
               <a:rPr lang="zh-TW" altLang="en-US" smtClean="0"/>
               <a:pPr/>
-              <a:t>2025/5/31</a:t>
+              <a:t>2026/5/22</a:t>
             </a:fld>
             <a:endParaRPr lang="zh-TW" altLang="en-US"/>
           </a:p>
@@ -662,7 +662,7 @@
             <a:fld id="{18D434DE-7E94-479A-8252-0F1D004EB8DD}" type="datetimeFigureOut">
               <a:rPr lang="zh-TW" altLang="en-US" smtClean="0"/>
               <a:pPr/>
-              <a:t>2025/5/31</a:t>
+              <a:t>2026/5/22</a:t>
             </a:fld>
             <a:endParaRPr lang="zh-TW" altLang="en-US"/>
           </a:p>
@@ -832,7 +832,7 @@
             <a:fld id="{18D434DE-7E94-479A-8252-0F1D004EB8DD}" type="datetimeFigureOut">
               <a:rPr lang="zh-TW" altLang="en-US" smtClean="0"/>
               <a:pPr/>
-              <a:t>2025/5/31</a:t>
+              <a:t>2026/5/22</a:t>
             </a:fld>
             <a:endParaRPr lang="zh-TW" altLang="en-US"/>
           </a:p>
@@ -1079,7 +1079,7 @@
             <a:fld id="{18D434DE-7E94-479A-8252-0F1D004EB8DD}" type="datetimeFigureOut">
               <a:rPr lang="zh-TW" altLang="en-US" smtClean="0"/>
               <a:pPr/>
-              <a:t>2025/5/31</a:t>
+              <a:t>2026/5/22</a:t>
             </a:fld>
             <a:endParaRPr lang="zh-TW" altLang="en-US"/>
           </a:p>
@@ -1366,7 +1366,7 @@
             <a:fld id="{18D434DE-7E94-479A-8252-0F1D004EB8DD}" type="datetimeFigureOut">
               <a:rPr lang="zh-TW" altLang="en-US" smtClean="0"/>
               <a:pPr/>
-              <a:t>2025/5/31</a:t>
+              <a:t>2026/5/22</a:t>
             </a:fld>
             <a:endParaRPr lang="zh-TW" altLang="en-US"/>
           </a:p>
@@ -1787,7 +1787,7 @@
             <a:fld id="{18D434DE-7E94-479A-8252-0F1D004EB8DD}" type="datetimeFigureOut">
               <a:rPr lang="zh-TW" altLang="en-US" smtClean="0"/>
               <a:pPr/>
-              <a:t>2025/5/31</a:t>
+              <a:t>2026/5/22</a:t>
             </a:fld>
             <a:endParaRPr lang="zh-TW" altLang="en-US"/>
           </a:p>
@@ -1906,7 +1906,7 @@
             <a:fld id="{18D434DE-7E94-479A-8252-0F1D004EB8DD}" type="datetimeFigureOut">
               <a:rPr lang="zh-TW" altLang="en-US" smtClean="0"/>
               <a:pPr/>
-              <a:t>2025/5/31</a:t>
+              <a:t>2026/5/22</a:t>
             </a:fld>
             <a:endParaRPr lang="zh-TW" altLang="en-US"/>
           </a:p>
@@ -2003,7 +2003,7 @@
             <a:fld id="{18D434DE-7E94-479A-8252-0F1D004EB8DD}" type="datetimeFigureOut">
               <a:rPr lang="zh-TW" altLang="en-US" smtClean="0"/>
               <a:pPr/>
-              <a:t>2025/5/31</a:t>
+              <a:t>2026/5/22</a:t>
             </a:fld>
             <a:endParaRPr lang="zh-TW" altLang="en-US"/>
           </a:p>
@@ -2280,7 +2280,7 @@
             <a:fld id="{18D434DE-7E94-479A-8252-0F1D004EB8DD}" type="datetimeFigureOut">
               <a:rPr lang="zh-TW" altLang="en-US" smtClean="0"/>
               <a:pPr/>
-              <a:t>2025/5/31</a:t>
+              <a:t>2026/5/22</a:t>
             </a:fld>
             <a:endParaRPr lang="zh-TW" altLang="en-US"/>
           </a:p>
@@ -2537,7 +2537,7 @@
             <a:fld id="{18D434DE-7E94-479A-8252-0F1D004EB8DD}" type="datetimeFigureOut">
               <a:rPr lang="zh-TW" altLang="en-US" smtClean="0"/>
               <a:pPr/>
-              <a:t>2025/5/31</a:t>
+              <a:t>2026/5/22</a:t>
             </a:fld>
             <a:endParaRPr lang="zh-TW" altLang="en-US"/>
           </a:p>
@@ -2755,7 +2755,7 @@
             <a:fld id="{18D434DE-7E94-479A-8252-0F1D004EB8DD}" type="datetimeFigureOut">
               <a:rPr lang="zh-TW" altLang="en-US" smtClean="0"/>
               <a:pPr/>
-              <a:t>2025/5/31</a:t>
+              <a:t>2026/5/22</a:t>
             </a:fld>
             <a:endParaRPr lang="zh-TW" altLang="en-US"/>
           </a:p>
@@ -3143,7 +3143,7 @@
         </p:nvSpPr>
         <p:spPr>
           <a:xfrm>
-            <a:off x="0" y="2636912"/>
+            <a:off x="0" y="2660915"/>
             <a:ext cx="12192000" cy="1143000"/>
           </a:xfrm>
         </p:spPr>
@@ -3154,9 +3154,9 @@
           <a:lstStyle/>
           <a:p>
             <a:r>
-              <a:rPr lang="zh-TW" altLang="zh-TW" sz="7200" b="1" i="1" dirty="0">
-                <a:solidFill>
-                  <a:srgbClr val="660033"/>
+              <a:rPr lang="zh-CN" altLang="en-US" sz="5333" b="1" u="sng" dirty="0">
+                <a:solidFill>
+                  <a:srgbClr val="000066"/>
                 </a:solidFill>
                 <a:effectLst>
                   <a:outerShdw blurRad="38100" dist="38100" dir="2700000" algn="tl">
@@ -3168,12 +3168,12 @@
                 <a:latin typeface="微軟正黑體" pitchFamily="34" charset="-120"/>
                 <a:ea typeface="微軟正黑體" pitchFamily="34" charset="-120"/>
               </a:rPr>
-              <a:t>祢</a:t>
-            </a:r>
-            <a:r>
-              <a:rPr lang="zh-CN" altLang="en-US" sz="7200" b="1" i="1" dirty="0">
-                <a:solidFill>
-                  <a:srgbClr val="660033"/>
+              <a:t>青年聖歌</a:t>
+            </a:r>
+            <a:r>
+              <a:rPr lang="en-US" altLang="zh-CN" sz="5333" b="1" u="sng" dirty="0">
+                <a:solidFill>
+                  <a:srgbClr val="000066"/>
                 </a:solidFill>
                 <a:effectLst>
                   <a:outerShdw blurRad="38100" dist="38100" dir="2700000" algn="tl">
@@ -3185,29 +3185,82 @@
                 <a:latin typeface="微軟正黑體" pitchFamily="34" charset="-120"/>
                 <a:ea typeface="微軟正黑體" pitchFamily="34" charset="-120"/>
               </a:rPr>
-              <a:t>真偉大</a:t>
-            </a:r>
-            <a:endParaRPr lang="zh-TW" altLang="en-US" sz="7200" b="1" i="1" dirty="0">
-              <a:solidFill>
-                <a:srgbClr val="660033"/>
-              </a:solidFill>
-              <a:effectLst>
-                <a:outerShdw blurRad="38100" dist="38100" dir="2700000" algn="tl">
-                  <a:srgbClr val="000000">
-                    <a:alpha val="43137"/>
-                  </a:srgbClr>
-                </a:outerShdw>
-              </a:effectLst>
-              <a:latin typeface="微軟正黑體" pitchFamily="34" charset="-120"/>
-              <a:ea typeface="微軟正黑體" pitchFamily="34" charset="-120"/>
-            </a:endParaRPr>
+              <a:t> I</a:t>
+            </a:r>
+            <a:r>
+              <a:rPr lang="zh-CN" altLang="en-US" sz="5333" b="1" u="sng" dirty="0">
+                <a:solidFill>
+                  <a:srgbClr val="000066"/>
+                </a:solidFill>
+                <a:effectLst>
+                  <a:outerShdw blurRad="38100" dist="38100" dir="2700000" algn="tl">
+                    <a:srgbClr val="000000">
+                      <a:alpha val="43137"/>
+                    </a:srgbClr>
+                  </a:outerShdw>
+                </a:effectLst>
+                <a:latin typeface="微軟正黑體" pitchFamily="34" charset="-120"/>
+                <a:ea typeface="微軟正黑體" pitchFamily="34" charset="-120"/>
+              </a:rPr>
+              <a:t> </a:t>
+            </a:r>
+            <a:r>
+              <a:rPr lang="en-US" altLang="zh-CN" sz="5333" b="1" u="sng" dirty="0">
+                <a:solidFill>
+                  <a:srgbClr val="000066"/>
+                </a:solidFill>
+                <a:effectLst>
+                  <a:outerShdw blurRad="38100" dist="38100" dir="2700000" algn="tl">
+                    <a:srgbClr val="000000">
+                      <a:alpha val="43137"/>
+                    </a:srgbClr>
+                  </a:outerShdw>
+                </a:effectLst>
+                <a:latin typeface="微軟正黑體" pitchFamily="34" charset="-120"/>
+                <a:ea typeface="微軟正黑體" pitchFamily="34" charset="-120"/>
+              </a:rPr>
+              <a:t>- 6</a:t>
+            </a:r>
+            <a:br>
+              <a:rPr lang="en-US" altLang="zh-CN" sz="7200" b="1" i="1" dirty="0">
+                <a:solidFill>
+                  <a:srgbClr val="660033"/>
+                </a:solidFill>
+                <a:effectLst>
+                  <a:outerShdw blurRad="38100" dist="38100" dir="2700000" algn="tl">
+                    <a:srgbClr val="000000">
+                      <a:alpha val="43137"/>
+                    </a:srgbClr>
+                  </a:outerShdw>
+                </a:effectLst>
+                <a:latin typeface="微軟正黑體" pitchFamily="34" charset="-120"/>
+                <a:ea typeface="微軟正黑體" pitchFamily="34" charset="-120"/>
+              </a:rPr>
+            </a:br>
+            <a:r>
+              <a:rPr lang="zh-TW" altLang="en-US" sz="8000" b="1" dirty="0">
+                <a:solidFill>
+                  <a:srgbClr val="660033"/>
+                </a:solidFill>
+                <a:effectLst>
+                  <a:outerShdw blurRad="38100" dist="38100" dir="2700000" algn="tl">
+                    <a:srgbClr val="000000">
+                      <a:alpha val="43137"/>
+                    </a:srgbClr>
+                  </a:outerShdw>
+                </a:effectLst>
+                <a:latin typeface="微軟正黑體" pitchFamily="34" charset="-120"/>
+                <a:ea typeface="微軟正黑體" pitchFamily="34" charset="-120"/>
+              </a:rPr>
+              <a:t>祢真偉大</a:t>
+            </a:r>
           </a:p>
         </p:txBody>
       </p:sp>
     </p:spTree>
     <p:extLst>
       <p:ext uri="{BB962C8B-B14F-4D97-AF65-F5344CB8AC3E}">
-        <p14:creationId xmlns:p14="http://schemas.microsoft.com/office/powerpoint/2010/main" val="1409280251"/>
+        <p14:creationId xmlns:p14="http://schemas.microsoft.com/office/powerpoint/2010/main" val="3724263107"/>
       </p:ext>
     </p:extLst>
   </p:cSld>
